--- a/2026/2026-06-05-AI-Updates.pptx
+++ b/2026/2026-06-05-AI-Updates.pptx
@@ -977,7 +977,7 @@
   <p:cSld>
     <p:spTree>
       <p:nvGrpSpPr>
-        <p:cNvPr id="1" name="Shape 143"/>
+        <p:cNvPr id="1" name="Shape 145"/>
         <p:cNvGrpSpPr/>
         <p:nvPr/>
       </p:nvGrpSpPr>
@@ -991,7 +991,7 @@
       </p:grpSpPr>
       <p:sp>
         <p:nvSpPr>
-          <p:cNvPr id="144" name="Google Shape;144;g3e4d4e7d6df_0_6:notes"/>
+          <p:cNvPr id="146" name="Google Shape;146;g3e4d4e7d6df_0_6:notes"/>
           <p:cNvSpPr>
             <a:spLocks noGrp="1" noRot="1" noChangeAspect="1"/>
           </p:cNvSpPr>
@@ -1042,7 +1042,7 @@
       </p:sp>
       <p:sp>
         <p:nvSpPr>
-          <p:cNvPr id="145" name="Google Shape;145;g3e4d4e7d6df_0_6:notes"/>
+          <p:cNvPr id="147" name="Google Shape;147;g3e4d4e7d6df_0_6:notes"/>
           <p:cNvSpPr txBox="1">
             <a:spLocks noGrp="1"/>
           </p:cNvSpPr>
@@ -1099,7 +1099,7 @@
   <p:cSld>
     <p:spTree>
       <p:nvGrpSpPr>
-        <p:cNvPr id="1" name="Shape 150"/>
+        <p:cNvPr id="1" name="Shape 152"/>
         <p:cNvGrpSpPr/>
         <p:nvPr/>
       </p:nvGrpSpPr>
@@ -1113,7 +1113,7 @@
       </p:grpSpPr>
       <p:sp>
         <p:nvSpPr>
-          <p:cNvPr id="151" name="Google Shape;151;g3e7172dbcdf_0_9:notes"/>
+          <p:cNvPr id="153" name="Google Shape;153;g3e7172dbcdf_0_9:notes"/>
           <p:cNvSpPr>
             <a:spLocks noGrp="1" noRot="1" noChangeAspect="1"/>
           </p:cNvSpPr>
@@ -1164,7 +1164,7 @@
       </p:sp>
       <p:sp>
         <p:nvSpPr>
-          <p:cNvPr id="152" name="Google Shape;152;g3e7172dbcdf_0_9:notes"/>
+          <p:cNvPr id="154" name="Google Shape;154;g3e7172dbcdf_0_9:notes"/>
           <p:cNvSpPr txBox="1">
             <a:spLocks noGrp="1"/>
           </p:cNvSpPr>
@@ -1221,7 +1221,7 @@
   <p:cSld>
     <p:spTree>
       <p:nvGrpSpPr>
-        <p:cNvPr id="1" name="Shape 159"/>
+        <p:cNvPr id="1" name="Shape 161"/>
         <p:cNvGrpSpPr/>
         <p:nvPr/>
       </p:nvGrpSpPr>
@@ -1235,7 +1235,7 @@
       </p:grpSpPr>
       <p:sp>
         <p:nvSpPr>
-          <p:cNvPr id="160" name="Google Shape;160;g3e81d3fe522_1_0:notes"/>
+          <p:cNvPr id="162" name="Google Shape;162;g3e81d3fe522_1_0:notes"/>
           <p:cNvSpPr>
             <a:spLocks noGrp="1" noRot="1" noChangeAspect="1"/>
           </p:cNvSpPr>
@@ -1286,7 +1286,7 @@
       </p:sp>
       <p:sp>
         <p:nvSpPr>
-          <p:cNvPr id="161" name="Google Shape;161;g3e81d3fe522_1_0:notes"/>
+          <p:cNvPr id="163" name="Google Shape;163;g3e81d3fe522_1_0:notes"/>
           <p:cNvSpPr txBox="1">
             <a:spLocks noGrp="1"/>
           </p:cNvSpPr>
@@ -1343,7 +1343,7 @@
   <p:cSld>
     <p:spTree>
       <p:nvGrpSpPr>
-        <p:cNvPr id="1" name="Shape 166"/>
+        <p:cNvPr id="1" name="Shape 174"/>
         <p:cNvGrpSpPr/>
         <p:nvPr/>
       </p:nvGrpSpPr>
@@ -1357,7 +1357,7 @@
       </p:grpSpPr>
       <p:sp>
         <p:nvSpPr>
-          <p:cNvPr id="167" name="Google Shape;167;g3e80cea21d9_1_0:notes"/>
+          <p:cNvPr id="175" name="Google Shape;175;g3e80cea21d9_1_0:notes"/>
           <p:cNvSpPr>
             <a:spLocks noGrp="1" noRot="1" noChangeAspect="1"/>
           </p:cNvSpPr>
@@ -1408,7 +1408,7 @@
       </p:sp>
       <p:sp>
         <p:nvSpPr>
-          <p:cNvPr id="168" name="Google Shape;168;g3e80cea21d9_1_0:notes"/>
+          <p:cNvPr id="176" name="Google Shape;176;g3e80cea21d9_1_0:notes"/>
           <p:cNvSpPr txBox="1">
             <a:spLocks noGrp="1"/>
           </p:cNvSpPr>
@@ -1465,7 +1465,7 @@
   <p:cSld>
     <p:spTree>
       <p:nvGrpSpPr>
-        <p:cNvPr id="1" name="Shape 173"/>
+        <p:cNvPr id="1" name="Shape 183"/>
         <p:cNvGrpSpPr/>
         <p:nvPr/>
       </p:nvGrpSpPr>
@@ -1479,7 +1479,7 @@
       </p:grpSpPr>
       <p:sp>
         <p:nvSpPr>
-          <p:cNvPr id="174" name="Google Shape;174;g3e4d4e7d6df_0_0:notes"/>
+          <p:cNvPr id="184" name="Google Shape;184;g3e4d4e7d6df_0_0:notes"/>
           <p:cNvSpPr>
             <a:spLocks noGrp="1" noRot="1" noChangeAspect="1"/>
           </p:cNvSpPr>
@@ -1530,7 +1530,7 @@
       </p:sp>
       <p:sp>
         <p:nvSpPr>
-          <p:cNvPr id="175" name="Google Shape;175;g3e4d4e7d6df_0_0:notes"/>
+          <p:cNvPr id="185" name="Google Shape;185;g3e4d4e7d6df_0_0:notes"/>
           <p:cNvSpPr txBox="1">
             <a:spLocks noGrp="1"/>
           </p:cNvSpPr>
@@ -1587,7 +1587,7 @@
   <p:cSld>
     <p:spTree>
       <p:nvGrpSpPr>
-        <p:cNvPr id="1" name="Shape 181"/>
+        <p:cNvPr id="1" name="Shape 194"/>
         <p:cNvGrpSpPr/>
         <p:nvPr/>
       </p:nvGrpSpPr>
@@ -1601,7 +1601,7 @@
       </p:grpSpPr>
       <p:sp>
         <p:nvSpPr>
-          <p:cNvPr id="182" name="Google Shape;182;g3e511f4d366_0_1:notes"/>
+          <p:cNvPr id="195" name="Google Shape;195;g3e511f4d366_0_1:notes"/>
           <p:cNvSpPr>
             <a:spLocks noGrp="1" noRot="1" noChangeAspect="1"/>
           </p:cNvSpPr>
@@ -1652,7 +1652,7 @@
       </p:sp>
       <p:sp>
         <p:nvSpPr>
-          <p:cNvPr id="183" name="Google Shape;183;g3e511f4d366_0_1:notes"/>
+          <p:cNvPr id="196" name="Google Shape;196;g3e511f4d366_0_1:notes"/>
           <p:cNvSpPr txBox="1">
             <a:spLocks noGrp="1"/>
           </p:cNvSpPr>
@@ -1709,7 +1709,7 @@
   <p:cSld>
     <p:spTree>
       <p:nvGrpSpPr>
-        <p:cNvPr id="1" name="Shape 190"/>
+        <p:cNvPr id="1" name="Shape 203"/>
         <p:cNvGrpSpPr/>
         <p:nvPr/>
       </p:nvGrpSpPr>
@@ -1723,7 +1723,7 @@
       </p:grpSpPr>
       <p:sp>
         <p:nvSpPr>
-          <p:cNvPr id="191" name="Google Shape;191;g3e4d3b04dd4_0_0:notes"/>
+          <p:cNvPr id="204" name="Google Shape;204;g3e4d3b04dd4_0_0:notes"/>
           <p:cNvSpPr>
             <a:spLocks noGrp="1" noRot="1" noChangeAspect="1"/>
           </p:cNvSpPr>
@@ -1774,7 +1774,7 @@
       </p:sp>
       <p:sp>
         <p:nvSpPr>
-          <p:cNvPr id="192" name="Google Shape;192;g3e4d3b04dd4_0_0:notes"/>
+          <p:cNvPr id="205" name="Google Shape;205;g3e4d3b04dd4_0_0:notes"/>
           <p:cNvSpPr txBox="1">
             <a:spLocks noGrp="1"/>
           </p:cNvSpPr>
@@ -1831,7 +1831,7 @@
   <p:cSld>
     <p:spTree>
       <p:nvGrpSpPr>
-        <p:cNvPr id="1" name="Shape 197"/>
+        <p:cNvPr id="1" name="Shape 210"/>
         <p:cNvGrpSpPr/>
         <p:nvPr/>
       </p:nvGrpSpPr>
@@ -1845,7 +1845,7 @@
       </p:grpSpPr>
       <p:sp>
         <p:nvSpPr>
-          <p:cNvPr id="198" name="Google Shape;198;g3d971967e09_0_13:notes"/>
+          <p:cNvPr id="211" name="Google Shape;211;g3d971967e09_0_13:notes"/>
           <p:cNvSpPr>
             <a:spLocks noGrp="1" noRot="1" noChangeAspect="1"/>
           </p:cNvSpPr>
@@ -1896,7 +1896,7 @@
       </p:sp>
       <p:sp>
         <p:nvSpPr>
-          <p:cNvPr id="199" name="Google Shape;199;g3d971967e09_0_13:notes"/>
+          <p:cNvPr id="212" name="Google Shape;212;g3d971967e09_0_13:notes"/>
           <p:cNvSpPr txBox="1">
             <a:spLocks noGrp="1"/>
           </p:cNvSpPr>
@@ -1953,7 +1953,7 @@
   <p:cSld>
     <p:spTree>
       <p:nvGrpSpPr>
-        <p:cNvPr id="1" name="Shape 208"/>
+        <p:cNvPr id="1" name="Shape 221"/>
         <p:cNvGrpSpPr/>
         <p:nvPr/>
       </p:nvGrpSpPr>
@@ -1967,7 +1967,7 @@
       </p:grpSpPr>
       <p:sp>
         <p:nvSpPr>
-          <p:cNvPr id="209" name="Google Shape;209;g3d971967e09_0_22:notes"/>
+          <p:cNvPr id="222" name="Google Shape;222;g3d971967e09_0_22:notes"/>
           <p:cNvSpPr>
             <a:spLocks noGrp="1" noRot="1" noChangeAspect="1"/>
           </p:cNvSpPr>
@@ -2018,7 +2018,7 @@
       </p:sp>
       <p:sp>
         <p:nvSpPr>
-          <p:cNvPr id="210" name="Google Shape;210;g3d971967e09_0_22:notes"/>
+          <p:cNvPr id="223" name="Google Shape;223;g3d971967e09_0_22:notes"/>
           <p:cNvSpPr txBox="1">
             <a:spLocks noGrp="1"/>
           </p:cNvSpPr>
@@ -2075,7 +2075,7 @@
   <p:cSld>
     <p:spTree>
       <p:nvGrpSpPr>
-        <p:cNvPr id="1" name="Shape 218"/>
+        <p:cNvPr id="1" name="Shape 231"/>
         <p:cNvGrpSpPr/>
         <p:nvPr/>
       </p:nvGrpSpPr>
@@ -2089,7 +2089,7 @@
       </p:grpSpPr>
       <p:sp>
         <p:nvSpPr>
-          <p:cNvPr id="219" name="Google Shape;219;g3d971967e09_0_31:notes"/>
+          <p:cNvPr id="232" name="Google Shape;232;g3d971967e09_0_31:notes"/>
           <p:cNvSpPr>
             <a:spLocks noGrp="1" noRot="1" noChangeAspect="1"/>
           </p:cNvSpPr>
@@ -2140,7 +2140,7 @@
       </p:sp>
       <p:sp>
         <p:nvSpPr>
-          <p:cNvPr id="220" name="Google Shape;220;g3d971967e09_0_31:notes"/>
+          <p:cNvPr id="233" name="Google Shape;233;g3d971967e09_0_31:notes"/>
           <p:cNvSpPr txBox="1">
             <a:spLocks noGrp="1"/>
           </p:cNvSpPr>
@@ -2441,7 +2441,7 @@
   <p:cSld>
     <p:spTree>
       <p:nvGrpSpPr>
-        <p:cNvPr id="1" name="Shape 91"/>
+        <p:cNvPr id="1" name="Shape 92"/>
         <p:cNvGrpSpPr/>
         <p:nvPr/>
       </p:nvGrpSpPr>
@@ -2455,7 +2455,7 @@
       </p:grpSpPr>
       <p:sp>
         <p:nvSpPr>
-          <p:cNvPr id="92" name="Google Shape;92;g3ed34215342_1_0:notes"/>
+          <p:cNvPr id="93" name="Google Shape;93;g3ed34215342_1_0:notes"/>
           <p:cNvSpPr>
             <a:spLocks noGrp="1" noRot="1" noChangeAspect="1"/>
           </p:cNvSpPr>
@@ -2506,7 +2506,7 @@
       </p:sp>
       <p:sp>
         <p:nvSpPr>
-          <p:cNvPr id="93" name="Google Shape;93;g3ed34215342_1_0:notes"/>
+          <p:cNvPr id="94" name="Google Shape;94;g3ed34215342_1_0:notes"/>
           <p:cNvSpPr txBox="1">
             <a:spLocks noGrp="1"/>
           </p:cNvSpPr>
@@ -2563,7 +2563,7 @@
   <p:cSld>
     <p:spTree>
       <p:nvGrpSpPr>
-        <p:cNvPr id="1" name="Shape 103"/>
+        <p:cNvPr id="1" name="Shape 104"/>
         <p:cNvGrpSpPr/>
         <p:nvPr/>
       </p:nvGrpSpPr>
@@ -2577,7 +2577,7 @@
       </p:grpSpPr>
       <p:sp>
         <p:nvSpPr>
-          <p:cNvPr id="104" name="Google Shape;104;g3e7172dbcdf_0_0:notes"/>
+          <p:cNvPr id="105" name="Google Shape;105;g3e7172dbcdf_0_0:notes"/>
           <p:cNvSpPr>
             <a:spLocks noGrp="1" noRot="1" noChangeAspect="1"/>
           </p:cNvSpPr>
@@ -2628,7 +2628,7 @@
       </p:sp>
       <p:sp>
         <p:nvSpPr>
-          <p:cNvPr id="105" name="Google Shape;105;g3e7172dbcdf_0_0:notes"/>
+          <p:cNvPr id="106" name="Google Shape;106;g3e7172dbcdf_0_0:notes"/>
           <p:cNvSpPr txBox="1">
             <a:spLocks noGrp="1"/>
           </p:cNvSpPr>
@@ -2685,7 +2685,7 @@
   <p:cSld>
     <p:spTree>
       <p:nvGrpSpPr>
-        <p:cNvPr id="1" name="Shape 109"/>
+        <p:cNvPr id="1" name="Shape 111"/>
         <p:cNvGrpSpPr/>
         <p:nvPr/>
       </p:nvGrpSpPr>
@@ -2699,7 +2699,7 @@
       </p:grpSpPr>
       <p:sp>
         <p:nvSpPr>
-          <p:cNvPr id="110" name="Google Shape;110;g3e75aa01608_1_2:notes"/>
+          <p:cNvPr id="112" name="Google Shape;112;g3e75aa01608_1_2:notes"/>
           <p:cNvSpPr>
             <a:spLocks noGrp="1" noRot="1" noChangeAspect="1"/>
           </p:cNvSpPr>
@@ -2750,7 +2750,7 @@
       </p:sp>
       <p:sp>
         <p:nvSpPr>
-          <p:cNvPr id="111" name="Google Shape;111;g3e75aa01608_1_2:notes"/>
+          <p:cNvPr id="113" name="Google Shape;113;g3e75aa01608_1_2:notes"/>
           <p:cNvSpPr txBox="1">
             <a:spLocks noGrp="1"/>
           </p:cNvSpPr>
@@ -2807,7 +2807,7 @@
   <p:cSld>
     <p:spTree>
       <p:nvGrpSpPr>
-        <p:cNvPr id="1" name="Shape 118"/>
+        <p:cNvPr id="1" name="Shape 120"/>
         <p:cNvGrpSpPr/>
         <p:nvPr/>
       </p:nvGrpSpPr>
@@ -2821,7 +2821,7 @@
       </p:grpSpPr>
       <p:sp>
         <p:nvSpPr>
-          <p:cNvPr id="119" name="Google Shape;119;g3e817bd81fb_0_1:notes"/>
+          <p:cNvPr id="121" name="Google Shape;121;g3e817bd81fb_0_1:notes"/>
           <p:cNvSpPr>
             <a:spLocks noGrp="1" noRot="1" noChangeAspect="1"/>
           </p:cNvSpPr>
@@ -2872,7 +2872,7 @@
       </p:sp>
       <p:sp>
         <p:nvSpPr>
-          <p:cNvPr id="120" name="Google Shape;120;g3e817bd81fb_0_1:notes"/>
+          <p:cNvPr id="122" name="Google Shape;122;g3e817bd81fb_0_1:notes"/>
           <p:cNvSpPr txBox="1">
             <a:spLocks noGrp="1"/>
           </p:cNvSpPr>
@@ -2929,7 +2929,7 @@
   <p:cSld>
     <p:spTree>
       <p:nvGrpSpPr>
-        <p:cNvPr id="1" name="Shape 127"/>
+        <p:cNvPr id="1" name="Shape 129"/>
         <p:cNvGrpSpPr/>
         <p:nvPr/>
       </p:nvGrpSpPr>
@@ -2943,7 +2943,7 @@
       </p:grpSpPr>
       <p:sp>
         <p:nvSpPr>
-          <p:cNvPr id="128" name="Google Shape;128;g39318675434_2_0:notes"/>
+          <p:cNvPr id="130" name="Google Shape;130;g39318675434_2_0:notes"/>
           <p:cNvSpPr>
             <a:spLocks noGrp="1" noRot="1" noChangeAspect="1"/>
           </p:cNvSpPr>
@@ -2994,7 +2994,7 @@
       </p:sp>
       <p:sp>
         <p:nvSpPr>
-          <p:cNvPr id="129" name="Google Shape;129;g39318675434_2_0:notes"/>
+          <p:cNvPr id="131" name="Google Shape;131;g39318675434_2_0:notes"/>
           <p:cNvSpPr txBox="1">
             <a:spLocks noGrp="1"/>
           </p:cNvSpPr>
@@ -3051,7 +3051,7 @@
   <p:cSld>
     <p:spTree>
       <p:nvGrpSpPr>
-        <p:cNvPr id="1" name="Shape 133"/>
+        <p:cNvPr id="1" name="Shape 135"/>
         <p:cNvGrpSpPr/>
         <p:nvPr/>
       </p:nvGrpSpPr>
@@ -3065,7 +3065,7 @@
       </p:grpSpPr>
       <p:sp>
         <p:nvSpPr>
-          <p:cNvPr id="134" name="Google Shape;134;g3e4d4e7d6df_1_0:notes"/>
+          <p:cNvPr id="136" name="Google Shape;136;g3e4d4e7d6df_1_0:notes"/>
           <p:cNvSpPr>
             <a:spLocks noGrp="1" noRot="1" noChangeAspect="1"/>
           </p:cNvSpPr>
@@ -3116,7 +3116,7 @@
       </p:sp>
       <p:sp>
         <p:nvSpPr>
-          <p:cNvPr id="135" name="Google Shape;135;g3e4d4e7d6df_1_0:notes"/>
+          <p:cNvPr id="137" name="Google Shape;137;g3e4d4e7d6df_1_0:notes"/>
           <p:cNvSpPr txBox="1">
             <a:spLocks noGrp="1"/>
           </p:cNvSpPr>
@@ -12985,7 +12985,7 @@
         </p:nvSpPr>
         <p:spPr>
           <a:xfrm>
-            <a:off x="4536607" y="4236413"/>
+            <a:off x="4536607" y="4447661"/>
             <a:ext cx="4525800" cy="510900"/>
           </a:xfrm>
           <a:prstGeom prst="rect">
@@ -13099,8 +13099,8 @@
         </p:nvSpPr>
         <p:spPr>
           <a:xfrm>
-            <a:off x="4628950" y="76275"/>
-            <a:ext cx="4420200" cy="400200"/>
+            <a:off x="4523350" y="242250"/>
+            <a:ext cx="4525800" cy="1015800"/>
           </a:xfrm>
           <a:prstGeom prst="rect">
             <a:avLst/>
@@ -13138,7 +13138,42 @@
                 <a:cs typeface="Calibri"/>
                 <a:sym typeface="Calibri"/>
               </a:rPr>
-              <a:t>xxx</a:t>
+              <a:t>This week in AI: </a:t>
+            </a:r>
+            <a:endParaRPr sz="2000" b="1" i="1">
+              <a:solidFill>
+                <a:srgbClr val="FF0000"/>
+              </a:solidFill>
+              <a:latin typeface="Calibri"/>
+              <a:ea typeface="Calibri"/>
+              <a:cs typeface="Calibri"/>
+              <a:sym typeface="Calibri"/>
+            </a:endParaRPr>
+          </a:p>
+          <a:p>
+            <a:pPr marL="0" marR="0" lvl="0" indent="0" algn="l" rtl="0">
+              <a:lnSpc>
+                <a:spcPct val="100000"/>
+              </a:lnSpc>
+              <a:spcBef>
+                <a:spcPts val="0"/>
+              </a:spcBef>
+              <a:spcAft>
+                <a:spcPts val="0"/>
+              </a:spcAft>
+              <a:buNone/>
+            </a:pPr>
+            <a:r>
+              <a:rPr lang="en" sz="2000" b="1" i="1">
+                <a:solidFill>
+                  <a:srgbClr val="FF0000"/>
+                </a:solidFill>
+                <a:latin typeface="Calibri"/>
+                <a:ea typeface="Calibri"/>
+                <a:cs typeface="Calibri"/>
+                <a:sym typeface="Calibri"/>
+              </a:rPr>
+              <a:t>everything got smarter, cheaper, faster, and somehow more expensive</a:t>
             </a:r>
             <a:endParaRPr sz="2000" b="1" i="1">
               <a:solidFill>
@@ -13160,8 +13195,8 @@
         </p:nvSpPr>
         <p:spPr>
           <a:xfrm>
-            <a:off x="4536607" y="664157"/>
-            <a:ext cx="4525800" cy="1742400"/>
+            <a:off x="4536607" y="1467756"/>
+            <a:ext cx="4525800" cy="1988700"/>
           </a:xfrm>
           <a:prstGeom prst="rect">
             <a:avLst/>
@@ -13184,6 +13219,46 @@
             <a:spAutoFit/>
           </a:bodyPr>
           <a:lstStyle/>
+          <a:p>
+            <a:pPr marL="228600" marR="0" lvl="0" indent="-215900" algn="l" rtl="0">
+              <a:lnSpc>
+                <a:spcPct val="100000"/>
+              </a:lnSpc>
+              <a:spcBef>
+                <a:spcPts val="0"/>
+              </a:spcBef>
+              <a:spcAft>
+                <a:spcPts val="0"/>
+              </a:spcAft>
+              <a:buClr>
+                <a:srgbClr val="3C78D8"/>
+              </a:buClr>
+              <a:buSzPts val="1600"/>
+              <a:buFont typeface="Calibri"/>
+              <a:buChar char="●"/>
+            </a:pPr>
+            <a:r>
+              <a:rPr lang="en" sz="1600" b="1">
+                <a:solidFill>
+                  <a:srgbClr val="3C78D8"/>
+                </a:solidFill>
+                <a:latin typeface="Calibri"/>
+                <a:ea typeface="Calibri"/>
+                <a:cs typeface="Calibri"/>
+                <a:sym typeface="Calibri"/>
+              </a:rPr>
+              <a:t>Agent Compiler - Optimized Reusable Paths</a:t>
+            </a:r>
+            <a:endParaRPr sz="1600" b="1">
+              <a:solidFill>
+                <a:srgbClr val="3C78D8"/>
+              </a:solidFill>
+              <a:latin typeface="Calibri"/>
+              <a:ea typeface="Calibri"/>
+              <a:cs typeface="Calibri"/>
+              <a:sym typeface="Calibri"/>
+            </a:endParaRPr>
+          </a:p>
           <a:p>
             <a:pPr marL="228600" marR="0" lvl="0" indent="-215900" algn="l" rtl="0">
               <a:lnSpc>
@@ -13474,8 +13549,8 @@
         </p:nvSpPr>
         <p:spPr>
           <a:xfrm>
-            <a:off x="100175" y="2918858"/>
-            <a:ext cx="4330200" cy="1988700"/>
+            <a:off x="100175" y="2735059"/>
+            <a:ext cx="4330200" cy="2235000"/>
           </a:xfrm>
           <a:prstGeom prst="rect">
             <a:avLst/>
@@ -13806,7 +13881,47 @@
                 <a:cs typeface="Calibri"/>
                 <a:sym typeface="Calibri"/>
               </a:rPr>
-              <a:t>Agent Compiler - Optimized Reusable Paths</a:t>
+              <a:t>Microsoft Project Solara chip-to-cloud platform</a:t>
+            </a:r>
+            <a:endParaRPr sz="1600" b="1">
+              <a:solidFill>
+                <a:srgbClr val="3C78D8"/>
+              </a:solidFill>
+              <a:latin typeface="Calibri"/>
+              <a:ea typeface="Calibri"/>
+              <a:cs typeface="Calibri"/>
+              <a:sym typeface="Calibri"/>
+            </a:endParaRPr>
+          </a:p>
+          <a:p>
+            <a:pPr marL="228600" marR="0" lvl="0" indent="-215900" algn="l" rtl="0">
+              <a:lnSpc>
+                <a:spcPct val="100000"/>
+              </a:lnSpc>
+              <a:spcBef>
+                <a:spcPts val="0"/>
+              </a:spcBef>
+              <a:spcAft>
+                <a:spcPts val="0"/>
+              </a:spcAft>
+              <a:buClr>
+                <a:srgbClr val="3C78D8"/>
+              </a:buClr>
+              <a:buSzPts val="1600"/>
+              <a:buFont typeface="Calibri"/>
+              <a:buChar char="●"/>
+            </a:pPr>
+            <a:r>
+              <a:rPr lang="en" sz="1600" b="1">
+                <a:solidFill>
+                  <a:srgbClr val="3C78D8"/>
+                </a:solidFill>
+                <a:latin typeface="Calibri"/>
+                <a:ea typeface="Calibri"/>
+                <a:cs typeface="Calibri"/>
+                <a:sym typeface="Calibri"/>
+              </a:rPr>
+              <a:t>5 files to personalize your Claude Code agent</a:t>
             </a:r>
             <a:endParaRPr sz="1600" b="1">
               <a:solidFill>
@@ -13833,7 +13948,7 @@
   <p:cSld>
     <p:spTree>
       <p:nvGrpSpPr>
-        <p:cNvPr id="1" name="Shape 146"/>
+        <p:cNvPr id="1" name="Shape 148"/>
         <p:cNvGrpSpPr/>
         <p:nvPr/>
       </p:nvGrpSpPr>
@@ -13847,7 +13962,7 @@
       </p:grpSpPr>
       <p:sp>
         <p:nvSpPr>
-          <p:cNvPr id="147" name="Google Shape;147;p24"/>
+          <p:cNvPr id="149" name="Google Shape;149;p24"/>
           <p:cNvSpPr txBox="1"/>
           <p:nvPr/>
         </p:nvSpPr>
@@ -13913,7 +14028,7 @@
       </p:sp>
       <p:sp>
         <p:nvSpPr>
-          <p:cNvPr id="148" name="Google Shape;148;p24"/>
+          <p:cNvPr id="150" name="Google Shape;150;p24"/>
           <p:cNvSpPr txBox="1"/>
           <p:nvPr/>
         </p:nvSpPr>
@@ -14292,7 +14407,7 @@
       </p:sp>
       <p:pic>
         <p:nvPicPr>
-          <p:cNvPr id="149" name="Google Shape;149;p24"/>
+          <p:cNvPr id="151" name="Google Shape;151;p24"/>
           <p:cNvPicPr preferRelativeResize="0"/>
           <p:nvPr/>
         </p:nvPicPr>
@@ -14342,7 +14457,7 @@
   <p:cSld>
     <p:spTree>
       <p:nvGrpSpPr>
-        <p:cNvPr id="1" name="Shape 153"/>
+        <p:cNvPr id="1" name="Shape 155"/>
         <p:cNvGrpSpPr/>
         <p:nvPr/>
       </p:nvGrpSpPr>
@@ -14356,7 +14471,7 @@
       </p:grpSpPr>
       <p:sp>
         <p:nvSpPr>
-          <p:cNvPr id="154" name="Google Shape;154;p25"/>
+          <p:cNvPr id="156" name="Google Shape;156;p25"/>
           <p:cNvSpPr txBox="1"/>
           <p:nvPr/>
         </p:nvSpPr>
@@ -14422,7 +14537,7 @@
       </p:sp>
       <p:sp>
         <p:nvSpPr>
-          <p:cNvPr id="155" name="Google Shape;155;p25"/>
+          <p:cNvPr id="157" name="Google Shape;157;p25"/>
           <p:cNvSpPr txBox="1"/>
           <p:nvPr/>
         </p:nvSpPr>
@@ -14700,7 +14815,7 @@
       </p:sp>
       <p:pic>
         <p:nvPicPr>
-          <p:cNvPr id="156" name="Google Shape;156;p25"/>
+          <p:cNvPr id="158" name="Google Shape;158;p25"/>
           <p:cNvPicPr preferRelativeResize="0"/>
           <p:nvPr/>
         </p:nvPicPr>
@@ -14718,7 +14833,7 @@
         </p:blipFill>
         <p:spPr>
           <a:xfrm>
-            <a:off x="4734050" y="1299850"/>
+            <a:off x="4890525" y="1189725"/>
             <a:ext cx="2290277" cy="1182349"/>
           </a:xfrm>
           <a:prstGeom prst="rect">
@@ -14732,7 +14847,7 @@
       </p:pic>
       <p:sp>
         <p:nvSpPr>
-          <p:cNvPr id="157" name="Google Shape;157;p25"/>
+          <p:cNvPr id="159" name="Google Shape;159;p25"/>
           <p:cNvSpPr txBox="1"/>
           <p:nvPr/>
         </p:nvSpPr>
@@ -14936,7 +15051,7 @@
       </p:sp>
       <p:pic>
         <p:nvPicPr>
-          <p:cNvPr id="158" name="Google Shape;158;p25"/>
+          <p:cNvPr id="160" name="Google Shape;160;p25"/>
           <p:cNvPicPr preferRelativeResize="0"/>
           <p:nvPr/>
         </p:nvPicPr>
@@ -14955,7 +15070,7 @@
         </p:blipFill>
         <p:spPr>
           <a:xfrm>
-            <a:off x="5024425" y="3187150"/>
+            <a:off x="5069050" y="3167725"/>
             <a:ext cx="2671607" cy="1496100"/>
           </a:xfrm>
           <a:prstGeom prst="rect">
@@ -14980,7 +15095,7 @@
   <p:cSld>
     <p:spTree>
       <p:nvGrpSpPr>
-        <p:cNvPr id="1" name="Shape 162"/>
+        <p:cNvPr id="1" name="Shape 164"/>
         <p:cNvGrpSpPr/>
         <p:nvPr/>
       </p:nvGrpSpPr>
@@ -14994,7 +15109,7 @@
       </p:grpSpPr>
       <p:sp>
         <p:nvSpPr>
-          <p:cNvPr id="163" name="Google Shape;163;p26"/>
+          <p:cNvPr id="165" name="Google Shape;165;p26"/>
           <p:cNvSpPr txBox="1"/>
           <p:nvPr/>
         </p:nvSpPr>
@@ -15060,14 +15175,14 @@
       </p:sp>
       <p:sp>
         <p:nvSpPr>
-          <p:cNvPr id="164" name="Google Shape;164;p26"/>
+          <p:cNvPr id="166" name="Google Shape;166;p26"/>
           <p:cNvSpPr txBox="1"/>
           <p:nvPr/>
         </p:nvSpPr>
         <p:spPr>
           <a:xfrm>
-            <a:off x="81775" y="1457639"/>
-            <a:ext cx="4425900" cy="387900"/>
+            <a:off x="81775" y="2314426"/>
+            <a:ext cx="2815200" cy="387900"/>
           </a:xfrm>
           <a:prstGeom prst="rect">
             <a:avLst/>
@@ -15168,13 +15283,13 @@
       </p:sp>
       <p:sp>
         <p:nvSpPr>
-          <p:cNvPr id="165" name="Google Shape;165;p26"/>
+          <p:cNvPr id="167" name="Google Shape;167;p26"/>
           <p:cNvSpPr txBox="1"/>
           <p:nvPr/>
         </p:nvSpPr>
         <p:spPr>
           <a:xfrm>
-            <a:off x="81775" y="591326"/>
+            <a:off x="81775" y="394076"/>
             <a:ext cx="4425900" cy="757200"/>
           </a:xfrm>
           <a:prstGeom prst="rect">
@@ -15346,6 +15461,691 @@
           </a:p>
         </p:txBody>
       </p:sp>
+      <p:sp>
+        <p:nvSpPr>
+          <p:cNvPr id="168" name="Google Shape;168;p26"/>
+          <p:cNvSpPr txBox="1"/>
+          <p:nvPr/>
+        </p:nvSpPr>
+        <p:spPr>
+          <a:xfrm>
+            <a:off x="4632900" y="3525964"/>
+            <a:ext cx="4425900" cy="1496100"/>
+          </a:xfrm>
+          <a:prstGeom prst="rect">
+            <a:avLst/>
+          </a:prstGeom>
+          <a:solidFill>
+            <a:srgbClr val="FFF2CC"/>
+          </a:solidFill>
+          <a:ln w="9525" cap="flat" cmpd="sng">
+            <a:solidFill>
+              <a:srgbClr val="FF0000"/>
+            </a:solidFill>
+            <a:prstDash val="solid"/>
+            <a:round/>
+            <a:headEnd type="none" w="sm" len="sm"/>
+            <a:tailEnd type="none" w="sm" len="sm"/>
+          </a:ln>
+        </p:spPr>
+        <p:txBody>
+          <a:bodyPr spcFirstLastPara="1" wrap="square" lIns="9125" tIns="9125" rIns="9125" bIns="9125" anchor="t" anchorCtr="0">
+            <a:spAutoFit/>
+          </a:bodyPr>
+          <a:lstStyle/>
+          <a:p>
+            <a:pPr marL="171450" marR="0" lvl="0" indent="-133350" algn="l" rtl="0">
+              <a:lnSpc>
+                <a:spcPct val="100000"/>
+              </a:lnSpc>
+              <a:spcBef>
+                <a:spcPts val="0"/>
+              </a:spcBef>
+              <a:spcAft>
+                <a:spcPts val="0"/>
+              </a:spcAft>
+              <a:buClr>
+                <a:srgbClr val="FF0000"/>
+              </a:buClr>
+              <a:buSzPts val="1200"/>
+              <a:buFont typeface="Calibri"/>
+              <a:buChar char="●"/>
+            </a:pPr>
+            <a:r>
+              <a:rPr lang="en" sz="1200" b="1">
+                <a:solidFill>
+                  <a:srgbClr val="FF0000"/>
+                </a:solidFill>
+                <a:latin typeface="Calibri"/>
+                <a:ea typeface="Calibri"/>
+                <a:cs typeface="Calibri"/>
+                <a:sym typeface="Calibri"/>
+              </a:rPr>
+              <a:t>Microsoft Project Solara chip-to-cloud platform</a:t>
+            </a:r>
+            <a:endParaRPr sz="1200" b="1">
+              <a:solidFill>
+                <a:srgbClr val="FF0000"/>
+              </a:solidFill>
+              <a:latin typeface="Calibri"/>
+              <a:ea typeface="Calibri"/>
+              <a:cs typeface="Calibri"/>
+              <a:sym typeface="Calibri"/>
+            </a:endParaRPr>
+          </a:p>
+          <a:p>
+            <a:pPr marL="171450" marR="0" lvl="0" indent="-133350" algn="l" rtl="0">
+              <a:lnSpc>
+                <a:spcPct val="100000"/>
+              </a:lnSpc>
+              <a:spcBef>
+                <a:spcPts val="0"/>
+              </a:spcBef>
+              <a:spcAft>
+                <a:spcPts val="0"/>
+              </a:spcAft>
+              <a:buClr>
+                <a:schemeClr val="dk1"/>
+              </a:buClr>
+              <a:buSzPts val="1200"/>
+              <a:buFont typeface="Calibri"/>
+              <a:buChar char="●"/>
+            </a:pPr>
+            <a:r>
+              <a:rPr lang="en" sz="1200">
+                <a:latin typeface="Calibri"/>
+                <a:ea typeface="Calibri"/>
+                <a:cs typeface="Calibri"/>
+                <a:sym typeface="Calibri"/>
+              </a:rPr>
+              <a:t>Built for "agent-first" enterprise hardware devices to run AI agents</a:t>
+            </a:r>
+            <a:endParaRPr sz="1200">
+              <a:latin typeface="Calibri"/>
+              <a:ea typeface="Calibri"/>
+              <a:cs typeface="Calibri"/>
+              <a:sym typeface="Calibri"/>
+            </a:endParaRPr>
+          </a:p>
+          <a:p>
+            <a:pPr marL="171450" marR="0" lvl="0" indent="-133350" algn="l" rtl="0">
+              <a:lnSpc>
+                <a:spcPct val="100000"/>
+              </a:lnSpc>
+              <a:spcBef>
+                <a:spcPts val="0"/>
+              </a:spcBef>
+              <a:spcAft>
+                <a:spcPts val="0"/>
+              </a:spcAft>
+              <a:buClr>
+                <a:schemeClr val="dk1"/>
+              </a:buClr>
+              <a:buSzPts val="1200"/>
+              <a:buFont typeface="Calibri"/>
+              <a:buChar char="●"/>
+            </a:pPr>
+            <a:r>
+              <a:rPr lang="en" sz="1200">
+                <a:latin typeface="Calibri"/>
+                <a:ea typeface="Calibri"/>
+                <a:cs typeface="Calibri"/>
+                <a:sym typeface="Calibri"/>
+              </a:rPr>
+              <a:t>Has a lightweight edge OS called Microsoft Device Ecosystem Platform (MDEP), which is built on AOSP (Android Open Source Project), not Windows</a:t>
+            </a:r>
+            <a:endParaRPr sz="1200">
+              <a:latin typeface="Calibri"/>
+              <a:ea typeface="Calibri"/>
+              <a:cs typeface="Calibri"/>
+              <a:sym typeface="Calibri"/>
+            </a:endParaRPr>
+          </a:p>
+          <a:p>
+            <a:pPr marL="171450" marR="0" lvl="0" indent="-133350" algn="l" rtl="0">
+              <a:lnSpc>
+                <a:spcPct val="100000"/>
+              </a:lnSpc>
+              <a:spcBef>
+                <a:spcPts val="0"/>
+              </a:spcBef>
+              <a:spcAft>
+                <a:spcPts val="0"/>
+              </a:spcAft>
+              <a:buClr>
+                <a:schemeClr val="dk1"/>
+              </a:buClr>
+              <a:buSzPts val="1200"/>
+              <a:buFont typeface="Calibri"/>
+              <a:buChar char="●"/>
+            </a:pPr>
+            <a:r>
+              <a:rPr lang="en" sz="1200">
+                <a:latin typeface="Calibri"/>
+                <a:ea typeface="Calibri"/>
+                <a:cs typeface="Calibri"/>
+                <a:sym typeface="Calibri"/>
+              </a:rPr>
+              <a:t>The AOSP choice is interesting. Microsoft is prioritizing a lean, flexible runtime for agent workloads over Windows compatibility, likely for better resource efficiency on edge hardware</a:t>
+            </a:r>
+            <a:endParaRPr sz="1200">
+              <a:latin typeface="Calibri"/>
+              <a:ea typeface="Calibri"/>
+              <a:cs typeface="Calibri"/>
+              <a:sym typeface="Calibri"/>
+            </a:endParaRPr>
+          </a:p>
+        </p:txBody>
+      </p:sp>
+      <p:pic>
+        <p:nvPicPr>
+          <p:cNvPr id="169" name="Google Shape;169;p26"/>
+          <p:cNvPicPr preferRelativeResize="0"/>
+          <p:nvPr/>
+        </p:nvPicPr>
+        <p:blipFill>
+          <a:blip r:embed="rId4" cstate="email">
+            <a:alphaModFix/>
+            <a:extLst>
+              <a:ext uri="{28A0092B-C50C-407E-A947-70E740481C1C}">
+                <a14:useLocalDpi xmlns:a14="http://schemas.microsoft.com/office/drawing/2010/main"/>
+              </a:ext>
+            </a:extLst>
+          </a:blip>
+          <a:stretch>
+            <a:fillRect/>
+          </a:stretch>
+        </p:blipFill>
+        <p:spPr>
+          <a:xfrm>
+            <a:off x="1251625" y="1846675"/>
+            <a:ext cx="1357649" cy="387900"/>
+          </a:xfrm>
+          <a:prstGeom prst="rect">
+            <a:avLst/>
+          </a:prstGeom>
+          <a:noFill/>
+          <a:ln w="9525" cap="flat" cmpd="sng">
+            <a:solidFill>
+              <a:srgbClr val="FF0000"/>
+            </a:solidFill>
+            <a:prstDash val="solid"/>
+            <a:round/>
+            <a:headEnd type="none" w="sm" len="sm"/>
+            <a:tailEnd type="none" w="sm" len="sm"/>
+          </a:ln>
+        </p:spPr>
+      </p:pic>
+      <p:pic>
+        <p:nvPicPr>
+          <p:cNvPr id="170" name="Google Shape;170;p26"/>
+          <p:cNvPicPr preferRelativeResize="0"/>
+          <p:nvPr/>
+        </p:nvPicPr>
+        <p:blipFill>
+          <a:blip r:embed="rId5" cstate="email">
+            <a:alphaModFix/>
+            <a:extLst>
+              <a:ext uri="{28A0092B-C50C-407E-A947-70E740481C1C}">
+                <a14:useLocalDpi xmlns:a14="http://schemas.microsoft.com/office/drawing/2010/main"/>
+              </a:ext>
+            </a:extLst>
+          </a:blip>
+          <a:stretch>
+            <a:fillRect/>
+          </a:stretch>
+        </p:blipFill>
+        <p:spPr>
+          <a:xfrm>
+            <a:off x="7131625" y="2050799"/>
+            <a:ext cx="1927163" cy="1370725"/>
+          </a:xfrm>
+          <a:prstGeom prst="rect">
+            <a:avLst/>
+          </a:prstGeom>
+          <a:noFill/>
+          <a:ln w="9525" cap="flat" cmpd="sng">
+            <a:solidFill>
+              <a:srgbClr val="FF0000"/>
+            </a:solidFill>
+            <a:prstDash val="solid"/>
+            <a:round/>
+            <a:headEnd type="none" w="sm" len="sm"/>
+            <a:tailEnd type="none" w="sm" len="sm"/>
+          </a:ln>
+        </p:spPr>
+      </p:pic>
+      <p:sp>
+        <p:nvSpPr>
+          <p:cNvPr id="171" name="Google Shape;171;p26"/>
+          <p:cNvSpPr txBox="1"/>
+          <p:nvPr/>
+        </p:nvSpPr>
+        <p:spPr>
+          <a:xfrm>
+            <a:off x="81775" y="3895264"/>
+            <a:ext cx="4425900" cy="1126800"/>
+          </a:xfrm>
+          <a:prstGeom prst="rect">
+            <a:avLst/>
+          </a:prstGeom>
+          <a:solidFill>
+            <a:srgbClr val="FFF2CC"/>
+          </a:solidFill>
+          <a:ln w="9525" cap="flat" cmpd="sng">
+            <a:solidFill>
+              <a:srgbClr val="FF0000"/>
+            </a:solidFill>
+            <a:prstDash val="solid"/>
+            <a:round/>
+            <a:headEnd type="none" w="sm" len="sm"/>
+            <a:tailEnd type="none" w="sm" len="sm"/>
+          </a:ln>
+        </p:spPr>
+        <p:txBody>
+          <a:bodyPr spcFirstLastPara="1" wrap="square" lIns="9125" tIns="9125" rIns="9125" bIns="9125" anchor="t" anchorCtr="0">
+            <a:spAutoFit/>
+          </a:bodyPr>
+          <a:lstStyle/>
+          <a:p>
+            <a:pPr marL="171450" marR="0" lvl="0" indent="-133350" algn="l" rtl="0">
+              <a:lnSpc>
+                <a:spcPct val="100000"/>
+              </a:lnSpc>
+              <a:spcBef>
+                <a:spcPts val="0"/>
+              </a:spcBef>
+              <a:spcAft>
+                <a:spcPts val="0"/>
+              </a:spcAft>
+              <a:buClr>
+                <a:srgbClr val="FF0000"/>
+              </a:buClr>
+              <a:buSzPts val="1200"/>
+              <a:buFont typeface="Calibri"/>
+              <a:buChar char="●"/>
+            </a:pPr>
+            <a:r>
+              <a:rPr lang="en" sz="1200" b="1">
+                <a:solidFill>
+                  <a:srgbClr val="FF0000"/>
+                </a:solidFill>
+                <a:latin typeface="Calibri"/>
+                <a:ea typeface="Calibri"/>
+                <a:cs typeface="Calibri"/>
+                <a:sym typeface="Calibri"/>
+              </a:rPr>
+              <a:t>5 files to personalize your Claude Code agent</a:t>
+            </a:r>
+            <a:endParaRPr sz="1200" b="1">
+              <a:solidFill>
+                <a:srgbClr val="FF0000"/>
+              </a:solidFill>
+              <a:latin typeface="Calibri"/>
+              <a:ea typeface="Calibri"/>
+              <a:cs typeface="Calibri"/>
+              <a:sym typeface="Calibri"/>
+            </a:endParaRPr>
+          </a:p>
+          <a:p>
+            <a:pPr marL="171450" marR="0" lvl="0" indent="-133350" algn="l" rtl="0">
+              <a:lnSpc>
+                <a:spcPct val="100000"/>
+              </a:lnSpc>
+              <a:spcBef>
+                <a:spcPts val="0"/>
+              </a:spcBef>
+              <a:spcAft>
+                <a:spcPts val="0"/>
+              </a:spcAft>
+              <a:buClr>
+                <a:schemeClr val="dk1"/>
+              </a:buClr>
+              <a:buSzPts val="1200"/>
+              <a:buFont typeface="Calibri"/>
+              <a:buChar char="●"/>
+            </a:pPr>
+            <a:r>
+              <a:rPr lang="en" sz="1200">
+                <a:latin typeface="Calibri"/>
+                <a:ea typeface="Calibri"/>
+                <a:cs typeface="Calibri"/>
+                <a:sym typeface="Calibri"/>
+              </a:rPr>
+              <a:t>1. </a:t>
+            </a:r>
+            <a:r>
+              <a:rPr lang="en" sz="1200" u="sng">
+                <a:solidFill>
+                  <a:schemeClr val="hlink"/>
+                </a:solidFill>
+                <a:latin typeface="Calibri"/>
+                <a:ea typeface="Calibri"/>
+                <a:cs typeface="Calibri"/>
+                <a:sym typeface="Calibri"/>
+                <a:hlinkClick r:id="rId6"/>
+              </a:rPr>
+              <a:t>CLAUDE.md</a:t>
+            </a:r>
+            <a:r>
+              <a:rPr lang="en" sz="1200">
+                <a:latin typeface="Calibri"/>
+                <a:ea typeface="Calibri"/>
+                <a:cs typeface="Calibri"/>
+                <a:sym typeface="Calibri"/>
+              </a:rPr>
+              <a:t> - style, preferences, behaviours</a:t>
+            </a:r>
+            <a:endParaRPr sz="1200">
+              <a:latin typeface="Calibri"/>
+              <a:ea typeface="Calibri"/>
+              <a:cs typeface="Calibri"/>
+              <a:sym typeface="Calibri"/>
+            </a:endParaRPr>
+          </a:p>
+          <a:p>
+            <a:pPr marL="171450" marR="0" lvl="0" indent="-133350" algn="l" rtl="0">
+              <a:lnSpc>
+                <a:spcPct val="100000"/>
+              </a:lnSpc>
+              <a:spcBef>
+                <a:spcPts val="0"/>
+              </a:spcBef>
+              <a:spcAft>
+                <a:spcPts val="0"/>
+              </a:spcAft>
+              <a:buClr>
+                <a:schemeClr val="dk1"/>
+              </a:buClr>
+              <a:buSzPts val="1200"/>
+              <a:buFont typeface="Calibri"/>
+              <a:buChar char="●"/>
+            </a:pPr>
+            <a:r>
+              <a:rPr lang="en" sz="1200">
+                <a:latin typeface="Calibri"/>
+                <a:ea typeface="Calibri"/>
+                <a:cs typeface="Calibri"/>
+                <a:sym typeface="Calibri"/>
+              </a:rPr>
+              <a:t>2. </a:t>
+            </a:r>
+            <a:r>
+              <a:rPr lang="en" sz="1200" u="sng">
+                <a:solidFill>
+                  <a:schemeClr val="hlink"/>
+                </a:solidFill>
+                <a:latin typeface="Calibri"/>
+                <a:ea typeface="Calibri"/>
+                <a:cs typeface="Calibri"/>
+                <a:sym typeface="Calibri"/>
+                <a:hlinkClick r:id="rId7"/>
+              </a:rPr>
+              <a:t>SOUL.md</a:t>
+            </a:r>
+            <a:r>
+              <a:rPr lang="en" sz="1200">
+                <a:latin typeface="Calibri"/>
+                <a:ea typeface="Calibri"/>
+                <a:cs typeface="Calibri"/>
+                <a:sym typeface="Calibri"/>
+              </a:rPr>
+              <a:t> - personality, values, and the underlying philosophy</a:t>
+            </a:r>
+            <a:endParaRPr sz="1200">
+              <a:latin typeface="Calibri"/>
+              <a:ea typeface="Calibri"/>
+              <a:cs typeface="Calibri"/>
+              <a:sym typeface="Calibri"/>
+            </a:endParaRPr>
+          </a:p>
+          <a:p>
+            <a:pPr marL="171450" marR="0" lvl="0" indent="-133350" algn="l" rtl="0">
+              <a:lnSpc>
+                <a:spcPct val="100000"/>
+              </a:lnSpc>
+              <a:spcBef>
+                <a:spcPts val="0"/>
+              </a:spcBef>
+              <a:spcAft>
+                <a:spcPts val="0"/>
+              </a:spcAft>
+              <a:buClr>
+                <a:schemeClr val="dk1"/>
+              </a:buClr>
+              <a:buSzPts val="1200"/>
+              <a:buFont typeface="Calibri"/>
+              <a:buChar char="●"/>
+            </a:pPr>
+            <a:r>
+              <a:rPr lang="en" sz="1200">
+                <a:latin typeface="Calibri"/>
+                <a:ea typeface="Calibri"/>
+                <a:cs typeface="Calibri"/>
+                <a:sym typeface="Calibri"/>
+              </a:rPr>
+              <a:t>3. </a:t>
+            </a:r>
+            <a:r>
+              <a:rPr lang="en" sz="1200" u="sng">
+                <a:solidFill>
+                  <a:schemeClr val="hlink"/>
+                </a:solidFill>
+                <a:latin typeface="Calibri"/>
+                <a:ea typeface="Calibri"/>
+                <a:cs typeface="Calibri"/>
+                <a:sym typeface="Calibri"/>
+                <a:hlinkClick r:id="rId8"/>
+              </a:rPr>
+              <a:t>DESIGN.md</a:t>
+            </a:r>
+            <a:r>
+              <a:rPr lang="en" sz="1200">
+                <a:latin typeface="Calibri"/>
+                <a:ea typeface="Calibri"/>
+                <a:cs typeface="Calibri"/>
+                <a:sym typeface="Calibri"/>
+              </a:rPr>
+              <a:t> - your design system (or technical standards)</a:t>
+            </a:r>
+            <a:endParaRPr sz="1200">
+              <a:latin typeface="Calibri"/>
+              <a:ea typeface="Calibri"/>
+              <a:cs typeface="Calibri"/>
+              <a:sym typeface="Calibri"/>
+            </a:endParaRPr>
+          </a:p>
+          <a:p>
+            <a:pPr marL="171450" marR="0" lvl="0" indent="-133350" algn="l" rtl="0">
+              <a:lnSpc>
+                <a:spcPct val="100000"/>
+              </a:lnSpc>
+              <a:spcBef>
+                <a:spcPts val="0"/>
+              </a:spcBef>
+              <a:spcAft>
+                <a:spcPts val="0"/>
+              </a:spcAft>
+              <a:buClr>
+                <a:schemeClr val="dk1"/>
+              </a:buClr>
+              <a:buSzPts val="1200"/>
+              <a:buFont typeface="Calibri"/>
+              <a:buChar char="●"/>
+            </a:pPr>
+            <a:r>
+              <a:rPr lang="en" sz="1200">
+                <a:latin typeface="Calibri"/>
+                <a:ea typeface="Calibri"/>
+                <a:cs typeface="Calibri"/>
+                <a:sym typeface="Calibri"/>
+              </a:rPr>
+              <a:t>4. </a:t>
+            </a:r>
+            <a:r>
+              <a:rPr lang="en" sz="1200" u="sng">
+                <a:solidFill>
+                  <a:schemeClr val="hlink"/>
+                </a:solidFill>
+                <a:latin typeface="Calibri"/>
+                <a:ea typeface="Calibri"/>
+                <a:cs typeface="Calibri"/>
+                <a:sym typeface="Calibri"/>
+                <a:hlinkClick r:id="rId9"/>
+              </a:rPr>
+              <a:t>VOICE.md</a:t>
+            </a:r>
+            <a:r>
+              <a:rPr lang="en" sz="1200">
+                <a:latin typeface="Calibri"/>
+                <a:ea typeface="Calibri"/>
+                <a:cs typeface="Calibri"/>
+                <a:sym typeface="Calibri"/>
+              </a:rPr>
+              <a:t> - your brand voice, vocabulary, ...</a:t>
+            </a:r>
+            <a:endParaRPr sz="1200">
+              <a:latin typeface="Calibri"/>
+              <a:ea typeface="Calibri"/>
+              <a:cs typeface="Calibri"/>
+              <a:sym typeface="Calibri"/>
+            </a:endParaRPr>
+          </a:p>
+          <a:p>
+            <a:pPr marL="171450" marR="0" lvl="0" indent="-133350" algn="l" rtl="0">
+              <a:lnSpc>
+                <a:spcPct val="100000"/>
+              </a:lnSpc>
+              <a:spcBef>
+                <a:spcPts val="0"/>
+              </a:spcBef>
+              <a:spcAft>
+                <a:spcPts val="0"/>
+              </a:spcAft>
+              <a:buClr>
+                <a:schemeClr val="dk1"/>
+              </a:buClr>
+              <a:buSzPts val="1200"/>
+              <a:buFont typeface="Calibri"/>
+              <a:buChar char="●"/>
+            </a:pPr>
+            <a:r>
+              <a:rPr lang="en" sz="1200">
+                <a:latin typeface="Calibri"/>
+                <a:ea typeface="Calibri"/>
+                <a:cs typeface="Calibri"/>
+                <a:sym typeface="Calibri"/>
+              </a:rPr>
+              <a:t>5. </a:t>
+            </a:r>
+            <a:r>
+              <a:rPr lang="en" sz="1200" u="sng">
+                <a:solidFill>
+                  <a:schemeClr val="hlink"/>
+                </a:solidFill>
+                <a:latin typeface="Calibri"/>
+                <a:ea typeface="Calibri"/>
+                <a:cs typeface="Calibri"/>
+                <a:sym typeface="Calibri"/>
+                <a:hlinkClick r:id="rId10"/>
+              </a:rPr>
+              <a:t>AUDIENCE.md</a:t>
+            </a:r>
+            <a:r>
+              <a:rPr lang="en" sz="1200">
+                <a:latin typeface="Calibri"/>
+                <a:ea typeface="Calibri"/>
+                <a:cs typeface="Calibri"/>
+                <a:sym typeface="Calibri"/>
+              </a:rPr>
+              <a:t> - who you are speaking to</a:t>
+            </a:r>
+            <a:endParaRPr sz="1200">
+              <a:latin typeface="Calibri"/>
+              <a:ea typeface="Calibri"/>
+              <a:cs typeface="Calibri"/>
+              <a:sym typeface="Calibri"/>
+            </a:endParaRPr>
+          </a:p>
+        </p:txBody>
+      </p:sp>
+      <p:pic>
+        <p:nvPicPr>
+          <p:cNvPr id="172" name="Google Shape;172;p26"/>
+          <p:cNvPicPr preferRelativeResize="0"/>
+          <p:nvPr/>
+        </p:nvPicPr>
+        <p:blipFill rotWithShape="1">
+          <a:blip r:embed="rId11" cstate="email">
+            <a:alphaModFix/>
+            <a:extLst>
+              <a:ext uri="{28A0092B-C50C-407E-A947-70E740481C1C}">
+                <a14:useLocalDpi xmlns:a14="http://schemas.microsoft.com/office/drawing/2010/main"/>
+              </a:ext>
+            </a:extLst>
+          </a:blip>
+          <a:srcRect/>
+          <a:stretch/>
+        </p:blipFill>
+        <p:spPr>
+          <a:xfrm>
+            <a:off x="1791750" y="3260625"/>
+            <a:ext cx="2433074" cy="534801"/>
+          </a:xfrm>
+          <a:prstGeom prst="rect">
+            <a:avLst/>
+          </a:prstGeom>
+          <a:noFill/>
+          <a:ln w="9525" cap="flat" cmpd="sng">
+            <a:solidFill>
+              <a:srgbClr val="FF0000"/>
+            </a:solidFill>
+            <a:prstDash val="solid"/>
+            <a:round/>
+            <a:headEnd type="none" w="sm" len="sm"/>
+            <a:tailEnd type="none" w="sm" len="sm"/>
+          </a:ln>
+        </p:spPr>
+      </p:pic>
+      <p:pic>
+        <p:nvPicPr>
+          <p:cNvPr id="173" name="Google Shape;173;p26"/>
+          <p:cNvPicPr preferRelativeResize="0"/>
+          <p:nvPr/>
+        </p:nvPicPr>
+        <p:blipFill>
+          <a:blip r:embed="rId12" cstate="email">
+            <a:alphaModFix/>
+            <a:extLst>
+              <a:ext uri="{28A0092B-C50C-407E-A947-70E740481C1C}">
+                <a14:useLocalDpi xmlns:a14="http://schemas.microsoft.com/office/drawing/2010/main"/>
+              </a:ext>
+            </a:extLst>
+          </a:blip>
+          <a:stretch>
+            <a:fillRect/>
+          </a:stretch>
+        </p:blipFill>
+        <p:spPr>
+          <a:xfrm>
+            <a:off x="4632899" y="67675"/>
+            <a:ext cx="2080125" cy="1878825"/>
+          </a:xfrm>
+          <a:prstGeom prst="rect">
+            <a:avLst/>
+          </a:prstGeom>
+          <a:noFill/>
+          <a:ln w="9525" cap="flat" cmpd="sng">
+            <a:solidFill>
+              <a:srgbClr val="FF0000"/>
+            </a:solidFill>
+            <a:prstDash val="solid"/>
+            <a:round/>
+            <a:headEnd type="none" w="sm" len="sm"/>
+            <a:tailEnd type="none" w="sm" len="sm"/>
+          </a:ln>
+        </p:spPr>
+      </p:pic>
     </p:spTree>
   </p:cSld>
   <p:clrMapOvr>
@@ -15359,7 +16159,7 @@
   <p:cSld>
     <p:spTree>
       <p:nvGrpSpPr>
-        <p:cNvPr id="1" name="Shape 169"/>
+        <p:cNvPr id="1" name="Shape 177"/>
         <p:cNvGrpSpPr/>
         <p:nvPr/>
       </p:nvGrpSpPr>
@@ -15373,7 +16173,7 @@
       </p:grpSpPr>
       <p:sp>
         <p:nvSpPr>
-          <p:cNvPr id="170" name="Google Shape;170;p27"/>
+          <p:cNvPr id="178" name="Google Shape;178;p27"/>
           <p:cNvSpPr txBox="1"/>
           <p:nvPr/>
         </p:nvSpPr>
@@ -15439,13 +16239,13 @@
       </p:sp>
       <p:sp>
         <p:nvSpPr>
-          <p:cNvPr id="171" name="Google Shape;171;p27"/>
+          <p:cNvPr id="179" name="Google Shape;179;p27"/>
           <p:cNvSpPr txBox="1"/>
           <p:nvPr/>
         </p:nvSpPr>
         <p:spPr>
           <a:xfrm>
-            <a:off x="81775" y="478750"/>
+            <a:off x="81775" y="1103550"/>
             <a:ext cx="4433100" cy="3897300"/>
           </a:xfrm>
           <a:prstGeom prst="rect">
@@ -15910,13 +16710,13 @@
       </p:sp>
       <p:sp>
         <p:nvSpPr>
-          <p:cNvPr id="172" name="Google Shape;172;p27"/>
+          <p:cNvPr id="180" name="Google Shape;180;p27"/>
           <p:cNvSpPr txBox="1"/>
           <p:nvPr/>
         </p:nvSpPr>
         <p:spPr>
           <a:xfrm>
-            <a:off x="4634700" y="2270375"/>
+            <a:off x="4657025" y="2211750"/>
             <a:ext cx="4433100" cy="2789100"/>
           </a:xfrm>
           <a:prstGeom prst="rect">
@@ -16235,6 +17035,84 @@
           </a:p>
         </p:txBody>
       </p:sp>
+      <p:pic>
+        <p:nvPicPr>
+          <p:cNvPr id="181" name="Google Shape;181;p27"/>
+          <p:cNvPicPr preferRelativeResize="0"/>
+          <p:nvPr/>
+        </p:nvPicPr>
+        <p:blipFill>
+          <a:blip r:embed="rId5" cstate="email">
+            <a:alphaModFix/>
+            <a:extLst>
+              <a:ext uri="{28A0092B-C50C-407E-A947-70E740481C1C}">
+                <a14:useLocalDpi xmlns:a14="http://schemas.microsoft.com/office/drawing/2010/main"/>
+              </a:ext>
+            </a:extLst>
+          </a:blip>
+          <a:stretch>
+            <a:fillRect/>
+          </a:stretch>
+        </p:blipFill>
+        <p:spPr>
+          <a:xfrm>
+            <a:off x="81775" y="518825"/>
+            <a:ext cx="3301075" cy="459975"/>
+          </a:xfrm>
+          <a:prstGeom prst="rect">
+            <a:avLst/>
+          </a:prstGeom>
+          <a:noFill/>
+          <a:ln w="9525" cap="flat" cmpd="sng">
+            <a:solidFill>
+              <a:srgbClr val="FF0000"/>
+            </a:solidFill>
+            <a:prstDash val="solid"/>
+            <a:round/>
+            <a:headEnd type="none" w="sm" len="sm"/>
+            <a:tailEnd type="none" w="sm" len="sm"/>
+          </a:ln>
+        </p:spPr>
+      </p:pic>
+      <p:pic>
+        <p:nvPicPr>
+          <p:cNvPr id="182" name="Google Shape;182;p27"/>
+          <p:cNvPicPr preferRelativeResize="0"/>
+          <p:nvPr/>
+        </p:nvPicPr>
+        <p:blipFill>
+          <a:blip r:embed="rId6" cstate="email">
+            <a:alphaModFix/>
+            <a:extLst>
+              <a:ext uri="{28A0092B-C50C-407E-A947-70E740481C1C}">
+                <a14:useLocalDpi xmlns:a14="http://schemas.microsoft.com/office/drawing/2010/main"/>
+              </a:ext>
+            </a:extLst>
+          </a:blip>
+          <a:stretch>
+            <a:fillRect/>
+          </a:stretch>
+        </p:blipFill>
+        <p:spPr>
+          <a:xfrm>
+            <a:off x="5405425" y="708175"/>
+            <a:ext cx="3620800" cy="1355925"/>
+          </a:xfrm>
+          <a:prstGeom prst="rect">
+            <a:avLst/>
+          </a:prstGeom>
+          <a:noFill/>
+          <a:ln w="9525" cap="flat" cmpd="sng">
+            <a:solidFill>
+              <a:srgbClr val="FF0000"/>
+            </a:solidFill>
+            <a:prstDash val="solid"/>
+            <a:round/>
+            <a:headEnd type="none" w="sm" len="sm"/>
+            <a:tailEnd type="none" w="sm" len="sm"/>
+          </a:ln>
+        </p:spPr>
+      </p:pic>
     </p:spTree>
   </p:cSld>
   <p:clrMapOvr>
@@ -16248,7 +17126,7 @@
   <p:cSld>
     <p:spTree>
       <p:nvGrpSpPr>
-        <p:cNvPr id="1" name="Shape 176"/>
+        <p:cNvPr id="1" name="Shape 186"/>
         <p:cNvGrpSpPr/>
         <p:nvPr/>
       </p:nvGrpSpPr>
@@ -16262,7 +17140,7 @@
       </p:grpSpPr>
       <p:sp>
         <p:nvSpPr>
-          <p:cNvPr id="177" name="Google Shape;177;p28"/>
+          <p:cNvPr id="187" name="Google Shape;187;p28"/>
           <p:cNvSpPr txBox="1"/>
           <p:nvPr/>
         </p:nvSpPr>
@@ -16328,7 +17206,7 @@
       </p:sp>
       <p:sp>
         <p:nvSpPr>
-          <p:cNvPr id="178" name="Google Shape;178;p28"/>
+          <p:cNvPr id="188" name="Google Shape;188;p28"/>
           <p:cNvSpPr txBox="1"/>
           <p:nvPr/>
         </p:nvSpPr>
@@ -16507,7 +17385,7 @@
       </p:sp>
       <p:sp>
         <p:nvSpPr>
-          <p:cNvPr id="179" name="Google Shape;179;p28"/>
+          <p:cNvPr id="189" name="Google Shape;189;p28"/>
           <p:cNvSpPr txBox="1"/>
           <p:nvPr/>
         </p:nvSpPr>
@@ -16701,7 +17579,7 @@
       </p:sp>
       <p:sp>
         <p:nvSpPr>
-          <p:cNvPr id="180" name="Google Shape;180;p28"/>
+          <p:cNvPr id="190" name="Google Shape;190;p28"/>
           <p:cNvSpPr txBox="1"/>
           <p:nvPr/>
         </p:nvSpPr>
@@ -16973,6 +17851,123 @@
           </a:p>
         </p:txBody>
       </p:sp>
+      <p:pic>
+        <p:nvPicPr>
+          <p:cNvPr id="191" name="Google Shape;191;p28"/>
+          <p:cNvPicPr preferRelativeResize="0"/>
+          <p:nvPr/>
+        </p:nvPicPr>
+        <p:blipFill>
+          <a:blip r:embed="rId4" cstate="email">
+            <a:alphaModFix/>
+            <a:extLst>
+              <a:ext uri="{28A0092B-C50C-407E-A947-70E740481C1C}">
+                <a14:useLocalDpi xmlns:a14="http://schemas.microsoft.com/office/drawing/2010/main"/>
+              </a:ext>
+            </a:extLst>
+          </a:blip>
+          <a:stretch>
+            <a:fillRect/>
+          </a:stretch>
+        </p:blipFill>
+        <p:spPr>
+          <a:xfrm>
+            <a:off x="4749850" y="586525"/>
+            <a:ext cx="2814775" cy="821700"/>
+          </a:xfrm>
+          <a:prstGeom prst="rect">
+            <a:avLst/>
+          </a:prstGeom>
+          <a:noFill/>
+          <a:ln w="9525" cap="flat" cmpd="sng">
+            <a:solidFill>
+              <a:srgbClr val="FF0000"/>
+            </a:solidFill>
+            <a:prstDash val="solid"/>
+            <a:round/>
+            <a:headEnd type="none" w="sm" len="sm"/>
+            <a:tailEnd type="none" w="sm" len="sm"/>
+          </a:ln>
+        </p:spPr>
+      </p:pic>
+      <p:pic>
+        <p:nvPicPr>
+          <p:cNvPr id="192" name="Google Shape;192;p28"/>
+          <p:cNvPicPr preferRelativeResize="0"/>
+          <p:nvPr/>
+        </p:nvPicPr>
+        <p:blipFill>
+          <a:blip r:embed="rId5" cstate="email">
+            <a:alphaModFix/>
+            <a:extLst>
+              <a:ext uri="{28A0092B-C50C-407E-A947-70E740481C1C}">
+                <a14:useLocalDpi xmlns:a14="http://schemas.microsoft.com/office/drawing/2010/main"/>
+              </a:ext>
+            </a:extLst>
+          </a:blip>
+          <a:stretch>
+            <a:fillRect/>
+          </a:stretch>
+        </p:blipFill>
+        <p:spPr>
+          <a:xfrm>
+            <a:off x="4749850" y="1637625"/>
+            <a:ext cx="2814775" cy="1020197"/>
+          </a:xfrm>
+          <a:prstGeom prst="rect">
+            <a:avLst/>
+          </a:prstGeom>
+          <a:noFill/>
+          <a:ln w="9525" cap="flat" cmpd="sng">
+            <a:solidFill>
+              <a:srgbClr val="FF0000"/>
+            </a:solidFill>
+            <a:prstDash val="solid"/>
+            <a:round/>
+            <a:headEnd type="none" w="sm" len="sm"/>
+            <a:tailEnd type="none" w="sm" len="sm"/>
+          </a:ln>
+        </p:spPr>
+      </p:pic>
+      <p:pic>
+        <p:nvPicPr>
+          <p:cNvPr id="193" name="Google Shape;193;p28"/>
+          <p:cNvPicPr preferRelativeResize="0"/>
+          <p:nvPr/>
+        </p:nvPicPr>
+        <p:blipFill>
+          <a:blip r:embed="rId6" cstate="email">
+            <a:alphaModFix/>
+            <a:extLst>
+              <a:ext uri="{28A0092B-C50C-407E-A947-70E740481C1C}">
+                <a14:useLocalDpi xmlns:a14="http://schemas.microsoft.com/office/drawing/2010/main"/>
+              </a:ext>
+            </a:extLst>
+          </a:blip>
+          <a:stretch>
+            <a:fillRect/>
+          </a:stretch>
+        </p:blipFill>
+        <p:spPr>
+          <a:xfrm>
+            <a:off x="4749850" y="2897887"/>
+            <a:ext cx="2527500" cy="1598469"/>
+          </a:xfrm>
+          <a:prstGeom prst="rect">
+            <a:avLst/>
+          </a:prstGeom>
+          <a:noFill/>
+          <a:ln w="9525" cap="flat" cmpd="sng">
+            <a:solidFill>
+              <a:srgbClr val="FF0000"/>
+            </a:solidFill>
+            <a:prstDash val="solid"/>
+            <a:round/>
+            <a:headEnd type="none" w="sm" len="sm"/>
+            <a:tailEnd type="none" w="sm" len="sm"/>
+          </a:ln>
+        </p:spPr>
+      </p:pic>
     </p:spTree>
   </p:cSld>
   <p:clrMapOvr>
@@ -16986,7 +17981,7 @@
   <p:cSld>
     <p:spTree>
       <p:nvGrpSpPr>
-        <p:cNvPr id="1" name="Shape 184"/>
+        <p:cNvPr id="1" name="Shape 197"/>
         <p:cNvGrpSpPr/>
         <p:nvPr/>
       </p:nvGrpSpPr>
@@ -17000,7 +17995,7 @@
       </p:grpSpPr>
       <p:sp>
         <p:nvSpPr>
-          <p:cNvPr id="185" name="Google Shape;185;p29"/>
+          <p:cNvPr id="198" name="Google Shape;198;p29"/>
           <p:cNvSpPr txBox="1"/>
           <p:nvPr/>
         </p:nvSpPr>
@@ -17066,7 +18061,7 @@
       </p:sp>
       <p:sp>
         <p:nvSpPr>
-          <p:cNvPr id="186" name="Google Shape;186;p29"/>
+          <p:cNvPr id="199" name="Google Shape;199;p29"/>
           <p:cNvSpPr txBox="1"/>
           <p:nvPr/>
         </p:nvSpPr>
@@ -17390,7 +18385,7 @@
       </p:sp>
       <p:sp>
         <p:nvSpPr>
-          <p:cNvPr id="187" name="Google Shape;187;p29"/>
+          <p:cNvPr id="200" name="Google Shape;200;p29"/>
           <p:cNvSpPr txBox="1"/>
           <p:nvPr/>
         </p:nvSpPr>
@@ -17741,7 +18736,7 @@
       </p:sp>
       <p:pic>
         <p:nvPicPr>
-          <p:cNvPr id="188" name="Google Shape;188;p29"/>
+          <p:cNvPr id="201" name="Google Shape;201;p29"/>
           <p:cNvPicPr preferRelativeResize="0"/>
           <p:nvPr/>
         </p:nvPicPr>
@@ -17755,8 +18750,8 @@
         </p:blipFill>
         <p:spPr>
           <a:xfrm>
-            <a:off x="6115000" y="276225"/>
-            <a:ext cx="2952750" cy="1543050"/>
+            <a:off x="5812925" y="118375"/>
+            <a:ext cx="3254825" cy="1700900"/>
           </a:xfrm>
           <a:prstGeom prst="rect">
             <a:avLst/>
@@ -17775,7 +18770,7 @@
       </p:pic>
       <p:pic>
         <p:nvPicPr>
-          <p:cNvPr id="189" name="Google Shape;189;p29"/>
+          <p:cNvPr id="202" name="Google Shape;202;p29"/>
           <p:cNvPicPr preferRelativeResize="0"/>
           <p:nvPr/>
         </p:nvPicPr>
@@ -17824,7 +18819,7 @@
   <p:cSld>
     <p:spTree>
       <p:nvGrpSpPr>
-        <p:cNvPr id="1" name="Shape 193"/>
+        <p:cNvPr id="1" name="Shape 206"/>
         <p:cNvGrpSpPr/>
         <p:nvPr/>
       </p:nvGrpSpPr>
@@ -17838,7 +18833,7 @@
       </p:grpSpPr>
       <p:sp>
         <p:nvSpPr>
-          <p:cNvPr id="194" name="Google Shape;194;p30"/>
+          <p:cNvPr id="207" name="Google Shape;207;p30"/>
           <p:cNvSpPr txBox="1"/>
           <p:nvPr/>
         </p:nvSpPr>
@@ -17904,7 +18899,7 @@
       </p:sp>
       <p:sp>
         <p:nvSpPr>
-          <p:cNvPr id="195" name="Google Shape;195;p30"/>
+          <p:cNvPr id="208" name="Google Shape;208;p30"/>
           <p:cNvSpPr txBox="1"/>
           <p:nvPr/>
         </p:nvSpPr>
@@ -18578,7 +19573,7 @@
       </p:sp>
       <p:sp>
         <p:nvSpPr>
-          <p:cNvPr id="196" name="Google Shape;196;p30"/>
+          <p:cNvPr id="209" name="Google Shape;209;p30"/>
           <p:cNvSpPr txBox="1"/>
           <p:nvPr/>
         </p:nvSpPr>
@@ -19103,7 +20098,7 @@
   <p:cSld>
     <p:spTree>
       <p:nvGrpSpPr>
-        <p:cNvPr id="1" name="Shape 200"/>
+        <p:cNvPr id="1" name="Shape 213"/>
         <p:cNvGrpSpPr/>
         <p:nvPr/>
       </p:nvGrpSpPr>
@@ -19117,7 +20112,7 @@
       </p:grpSpPr>
       <p:sp>
         <p:nvSpPr>
-          <p:cNvPr id="201" name="Google Shape;201;p31"/>
+          <p:cNvPr id="214" name="Google Shape;214;p31"/>
           <p:cNvSpPr txBox="1"/>
           <p:nvPr/>
         </p:nvSpPr>
@@ -19183,7 +20178,7 @@
       </p:sp>
       <p:sp>
         <p:nvSpPr>
-          <p:cNvPr id="202" name="Google Shape;202;p31"/>
+          <p:cNvPr id="215" name="Google Shape;215;p31"/>
           <p:cNvSpPr txBox="1"/>
           <p:nvPr/>
         </p:nvSpPr>
@@ -19311,7 +20306,7 @@
       </p:sp>
       <p:sp>
         <p:nvSpPr>
-          <p:cNvPr id="203" name="Google Shape;203;p31"/>
+          <p:cNvPr id="216" name="Google Shape;216;p31"/>
           <p:cNvSpPr txBox="1"/>
           <p:nvPr/>
         </p:nvSpPr>
@@ -19581,7 +20576,7 @@
       </p:sp>
       <p:sp>
         <p:nvSpPr>
-          <p:cNvPr id="204" name="Google Shape;204;p31"/>
+          <p:cNvPr id="217" name="Google Shape;217;p31"/>
           <p:cNvSpPr txBox="1"/>
           <p:nvPr/>
         </p:nvSpPr>
@@ -19842,7 +20837,7 @@
       </p:sp>
       <p:pic>
         <p:nvPicPr>
-          <p:cNvPr id="205" name="Google Shape;205;p31"/>
+          <p:cNvPr id="218" name="Google Shape;218;p31"/>
           <p:cNvPicPr preferRelativeResize="0"/>
           <p:nvPr/>
         </p:nvPicPr>
@@ -19881,7 +20876,7 @@
       </p:pic>
       <p:pic>
         <p:nvPicPr>
-          <p:cNvPr id="206" name="Google Shape;206;p31"/>
+          <p:cNvPr id="219" name="Google Shape;219;p31"/>
           <p:cNvPicPr preferRelativeResize="0"/>
           <p:nvPr/>
         </p:nvPicPr>
@@ -19920,7 +20915,7 @@
       </p:pic>
       <p:pic>
         <p:nvPicPr>
-          <p:cNvPr id="207" name="Google Shape;207;p31"/>
+          <p:cNvPr id="220" name="Google Shape;220;p31"/>
           <p:cNvPicPr preferRelativeResize="0"/>
           <p:nvPr/>
         </p:nvPicPr>
@@ -19970,7 +20965,7 @@
   <p:cSld>
     <p:spTree>
       <p:nvGrpSpPr>
-        <p:cNvPr id="1" name="Shape 211"/>
+        <p:cNvPr id="1" name="Shape 224"/>
         <p:cNvGrpSpPr/>
         <p:nvPr/>
       </p:nvGrpSpPr>
@@ -19984,7 +20979,7 @@
       </p:grpSpPr>
       <p:pic>
         <p:nvPicPr>
-          <p:cNvPr id="212" name="Google Shape;212;p32"/>
+          <p:cNvPr id="225" name="Google Shape;225;p32"/>
           <p:cNvPicPr preferRelativeResize="0"/>
           <p:nvPr/>
         </p:nvPicPr>
@@ -20016,7 +21011,7 @@
       </p:pic>
       <p:sp>
         <p:nvSpPr>
-          <p:cNvPr id="213" name="Google Shape;213;p32"/>
+          <p:cNvPr id="226" name="Google Shape;226;p32"/>
           <p:cNvSpPr txBox="1"/>
           <p:nvPr/>
         </p:nvSpPr>
@@ -20082,7 +21077,7 @@
       </p:sp>
       <p:sp>
         <p:nvSpPr>
-          <p:cNvPr id="214" name="Google Shape;214;p32"/>
+          <p:cNvPr id="227" name="Google Shape;227;p32"/>
           <p:cNvSpPr txBox="1"/>
           <p:nvPr/>
         </p:nvSpPr>
@@ -20512,7 +21507,7 @@
       </p:sp>
       <p:pic>
         <p:nvPicPr>
-          <p:cNvPr id="215" name="Google Shape;215;p32"/>
+          <p:cNvPr id="228" name="Google Shape;228;p32"/>
           <p:cNvPicPr preferRelativeResize="0"/>
           <p:nvPr/>
         </p:nvPicPr>
@@ -20544,7 +21539,7 @@
       </p:pic>
       <p:sp>
         <p:nvSpPr>
-          <p:cNvPr id="216" name="Google Shape;216;p32"/>
+          <p:cNvPr id="229" name="Google Shape;229;p32"/>
           <p:cNvSpPr txBox="1"/>
           <p:nvPr/>
         </p:nvSpPr>
@@ -20623,7 +21618,7 @@
       </p:sp>
       <p:sp>
         <p:nvSpPr>
-          <p:cNvPr id="217" name="Google Shape;217;p32"/>
+          <p:cNvPr id="230" name="Google Shape;230;p32"/>
           <p:cNvSpPr txBox="1"/>
           <p:nvPr/>
         </p:nvSpPr>
@@ -20700,7 +21695,7 @@
   <p:cSld>
     <p:spTree>
       <p:nvGrpSpPr>
-        <p:cNvPr id="1" name="Shape 221"/>
+        <p:cNvPr id="1" name="Shape 234"/>
         <p:cNvGrpSpPr/>
         <p:nvPr/>
       </p:nvGrpSpPr>
@@ -20714,7 +21709,7 @@
       </p:grpSpPr>
       <p:sp>
         <p:nvSpPr>
-          <p:cNvPr id="222" name="Google Shape;222;p33"/>
+          <p:cNvPr id="235" name="Google Shape;235;p33"/>
           <p:cNvSpPr txBox="1"/>
           <p:nvPr/>
         </p:nvSpPr>
@@ -22289,7 +23284,7 @@
             <a:tbl>
               <a:tblPr>
                 <a:noFill/>
-                <a:tableStyleId>{D88F8B79-C435-432A-A991-AA3FCFF451A0}</a:tableStyleId>
+                <a:tableStyleId>{800332CD-9365-45DA-97F6-54CA6B42B096}</a:tableStyleId>
               </a:tblPr>
               <a:tblGrid>
                 <a:gridCol w="219050">
@@ -22658,7 +23653,7 @@
             <a:tbl>
               <a:tblPr>
                 <a:noFill/>
-                <a:tableStyleId>{D88F8B79-C435-432A-A991-AA3FCFF451A0}</a:tableStyleId>
+                <a:tableStyleId>{800332CD-9365-45DA-97F6-54CA6B42B096}</a:tableStyleId>
               </a:tblPr>
               <a:tblGrid>
                 <a:gridCol w="276225">
@@ -28981,7 +29976,7 @@
             <a:tbl>
               <a:tblPr>
                 <a:noFill/>
-                <a:tableStyleId>{D88F8B79-C435-432A-A991-AA3FCFF451A0}</a:tableStyleId>
+                <a:tableStyleId>{800332CD-9365-45DA-97F6-54CA6B42B096}</a:tableStyleId>
               </a:tblPr>
               <a:tblGrid>
                 <a:gridCol w="276225">
@@ -36137,7 +37132,7 @@
         </p:blipFill>
         <p:spPr>
           <a:xfrm>
-            <a:off x="5554025" y="892975"/>
+            <a:off x="5353175" y="957875"/>
             <a:ext cx="3162300" cy="1447800"/>
           </a:xfrm>
           <a:prstGeom prst="rect">
@@ -36441,6 +37436,45 @@
           </a:p>
         </p:txBody>
       </p:sp>
+      <p:pic>
+        <p:nvPicPr>
+          <p:cNvPr id="91" name="Google Shape;91;p17"/>
+          <p:cNvPicPr preferRelativeResize="0"/>
+          <p:nvPr/>
+        </p:nvPicPr>
+        <p:blipFill>
+          <a:blip r:embed="rId5" cstate="email">
+            <a:alphaModFix/>
+            <a:extLst>
+              <a:ext uri="{28A0092B-C50C-407E-A947-70E740481C1C}">
+                <a14:useLocalDpi xmlns:a14="http://schemas.microsoft.com/office/drawing/2010/main"/>
+              </a:ext>
+            </a:extLst>
+          </a:blip>
+          <a:stretch>
+            <a:fillRect/>
+          </a:stretch>
+        </p:blipFill>
+        <p:spPr>
+          <a:xfrm>
+            <a:off x="5353175" y="3095062"/>
+            <a:ext cx="3438250" cy="1060125"/>
+          </a:xfrm>
+          <a:prstGeom prst="rect">
+            <a:avLst/>
+          </a:prstGeom>
+          <a:noFill/>
+          <a:ln w="9525" cap="flat" cmpd="sng">
+            <a:solidFill>
+              <a:srgbClr val="FF0000"/>
+            </a:solidFill>
+            <a:prstDash val="solid"/>
+            <a:round/>
+            <a:headEnd type="none" w="sm" len="sm"/>
+            <a:tailEnd type="none" w="sm" len="sm"/>
+          </a:ln>
+        </p:spPr>
+      </p:pic>
     </p:spTree>
   </p:cSld>
   <p:clrMapOvr>
@@ -36454,7 +37488,7 @@
   <p:cSld>
     <p:spTree>
       <p:nvGrpSpPr>
-        <p:cNvPr id="1" name="Shape 94"/>
+        <p:cNvPr id="1" name="Shape 95"/>
         <p:cNvGrpSpPr/>
         <p:nvPr/>
       </p:nvGrpSpPr>
@@ -36468,7 +37502,7 @@
       </p:grpSpPr>
       <p:sp>
         <p:nvSpPr>
-          <p:cNvPr id="95" name="Google Shape;95;p18"/>
+          <p:cNvPr id="96" name="Google Shape;96;p18"/>
           <p:cNvSpPr txBox="1"/>
           <p:nvPr/>
         </p:nvSpPr>
@@ -36534,7 +37568,7 @@
       </p:sp>
       <p:sp>
         <p:nvSpPr>
-          <p:cNvPr id="96" name="Google Shape;96;p18"/>
+          <p:cNvPr id="97" name="Google Shape;97;p18"/>
           <p:cNvSpPr txBox="1"/>
           <p:nvPr/>
         </p:nvSpPr>
@@ -36592,7 +37626,7 @@
                 <a:cs typeface="Calibri"/>
                 <a:sym typeface="Calibri"/>
               </a:rPr>
-              <a:t>NVIDIA CEO Jensen Huang keynote (GTC Taipei)</a:t>
+              <a:t>NVIDIA CEO Jensen Huang keynote (GTC in Taipei, Taiwan)</a:t>
             </a:r>
             <a:endParaRPr sz="1200" b="1">
               <a:solidFill>
@@ -36907,7 +37941,7 @@
       </p:sp>
       <p:pic>
         <p:nvPicPr>
-          <p:cNvPr id="97" name="Google Shape;97;p18"/>
+          <p:cNvPr id="98" name="Google Shape;98;p18"/>
           <p:cNvPicPr preferRelativeResize="0"/>
           <p:nvPr/>
         </p:nvPicPr>
@@ -36946,7 +37980,7 @@
       </p:pic>
       <p:sp>
         <p:nvSpPr>
-          <p:cNvPr id="98" name="Google Shape;98;p18"/>
+          <p:cNvPr id="99" name="Google Shape;99;p18"/>
           <p:cNvSpPr txBox="1"/>
           <p:nvPr/>
         </p:nvSpPr>
@@ -37427,7 +38461,7 @@
       </p:sp>
       <p:pic>
         <p:nvPicPr>
-          <p:cNvPr id="99" name="Google Shape;99;p18"/>
+          <p:cNvPr id="100" name="Google Shape;100;p18"/>
           <p:cNvPicPr preferRelativeResize="0"/>
           <p:nvPr/>
         </p:nvPicPr>
@@ -37465,7 +38499,7 @@
       </p:pic>
       <p:graphicFrame>
         <p:nvGraphicFramePr>
-          <p:cNvPr id="100" name="Google Shape;100;p18"/>
+          <p:cNvPr id="101" name="Google Shape;101;p18"/>
           <p:cNvGraphicFramePr/>
           <p:nvPr/>
         </p:nvGraphicFramePr>
@@ -37478,7 +38512,7 @@
             <a:tbl>
               <a:tblPr>
                 <a:noFill/>
-                <a:tableStyleId>{D88F8B79-C435-432A-A991-AA3FCFF451A0}</a:tableStyleId>
+                <a:tableStyleId>{800332CD-9365-45DA-97F6-54CA6B42B096}</a:tableStyleId>
               </a:tblPr>
               <a:tblGrid>
                 <a:gridCol w="1002200">
@@ -39561,7 +40595,7 @@
       </p:graphicFrame>
       <p:sp>
         <p:nvSpPr>
-          <p:cNvPr id="101" name="Google Shape;101;p18"/>
+          <p:cNvPr id="102" name="Google Shape;102;p18"/>
           <p:cNvSpPr txBox="1"/>
           <p:nvPr/>
         </p:nvSpPr>
@@ -39835,7 +40869,7 @@
       </p:sp>
       <p:graphicFrame>
         <p:nvGraphicFramePr>
-          <p:cNvPr id="102" name="Google Shape;102;p18"/>
+          <p:cNvPr id="103" name="Google Shape;103;p18"/>
           <p:cNvGraphicFramePr/>
           <p:nvPr/>
         </p:nvGraphicFramePr>
@@ -39848,7 +40882,7 @@
             <a:tbl>
               <a:tblPr>
                 <a:noFill/>
-                <a:tableStyleId>{D88F8B79-C435-432A-A991-AA3FCFF451A0}</a:tableStyleId>
+                <a:tableStyleId>{800332CD-9365-45DA-97F6-54CA6B42B096}</a:tableStyleId>
               </a:tblPr>
               <a:tblGrid>
                 <a:gridCol w="1366225">
@@ -41092,7 +42126,7 @@
   <p:cSld>
     <p:spTree>
       <p:nvGrpSpPr>
-        <p:cNvPr id="1" name="Shape 106"/>
+        <p:cNvPr id="1" name="Shape 107"/>
         <p:cNvGrpSpPr/>
         <p:nvPr/>
       </p:nvGrpSpPr>
@@ -41106,7 +42140,7 @@
       </p:grpSpPr>
       <p:sp>
         <p:nvSpPr>
-          <p:cNvPr id="107" name="Google Shape;107;p19"/>
+          <p:cNvPr id="108" name="Google Shape;108;p19"/>
           <p:cNvSpPr txBox="1"/>
           <p:nvPr/>
         </p:nvSpPr>
@@ -41172,13 +42206,13 @@
       </p:sp>
       <p:sp>
         <p:nvSpPr>
-          <p:cNvPr id="108" name="Google Shape;108;p19"/>
+          <p:cNvPr id="109" name="Google Shape;109;p19"/>
           <p:cNvSpPr txBox="1"/>
           <p:nvPr/>
         </p:nvSpPr>
         <p:spPr>
           <a:xfrm>
-            <a:off x="81775" y="478751"/>
+            <a:off x="81775" y="1067226"/>
             <a:ext cx="4425900" cy="2050200"/>
           </a:xfrm>
           <a:prstGeom prst="rect">
@@ -41417,6 +42451,45 @@
           </a:p>
         </p:txBody>
       </p:sp>
+      <p:pic>
+        <p:nvPicPr>
+          <p:cNvPr id="110" name="Google Shape;110;p19"/>
+          <p:cNvPicPr preferRelativeResize="0"/>
+          <p:nvPr/>
+        </p:nvPicPr>
+        <p:blipFill>
+          <a:blip r:embed="rId3" cstate="email">
+            <a:alphaModFix/>
+            <a:extLst>
+              <a:ext uri="{28A0092B-C50C-407E-A947-70E740481C1C}">
+                <a14:useLocalDpi xmlns:a14="http://schemas.microsoft.com/office/drawing/2010/main"/>
+              </a:ext>
+            </a:extLst>
+          </a:blip>
+          <a:stretch>
+            <a:fillRect/>
+          </a:stretch>
+        </p:blipFill>
+        <p:spPr>
+          <a:xfrm>
+            <a:off x="4883075" y="1273351"/>
+            <a:ext cx="3072051" cy="1637950"/>
+          </a:xfrm>
+          <a:prstGeom prst="rect">
+            <a:avLst/>
+          </a:prstGeom>
+          <a:noFill/>
+          <a:ln w="9525" cap="flat" cmpd="sng">
+            <a:solidFill>
+              <a:srgbClr val="FF0000"/>
+            </a:solidFill>
+            <a:prstDash val="solid"/>
+            <a:round/>
+            <a:headEnd type="none" w="sm" len="sm"/>
+            <a:tailEnd type="none" w="sm" len="sm"/>
+          </a:ln>
+        </p:spPr>
+      </p:pic>
     </p:spTree>
   </p:cSld>
   <p:clrMapOvr>
@@ -41430,7 +42503,7 @@
   <p:cSld>
     <p:spTree>
       <p:nvGrpSpPr>
-        <p:cNvPr id="1" name="Shape 112"/>
+        <p:cNvPr id="1" name="Shape 114"/>
         <p:cNvGrpSpPr/>
         <p:nvPr/>
       </p:nvGrpSpPr>
@@ -41444,7 +42517,7 @@
       </p:grpSpPr>
       <p:sp>
         <p:nvSpPr>
-          <p:cNvPr id="113" name="Google Shape;113;p20"/>
+          <p:cNvPr id="115" name="Google Shape;115;p20"/>
           <p:cNvSpPr txBox="1"/>
           <p:nvPr/>
         </p:nvSpPr>
@@ -41510,7 +42583,7 @@
       </p:sp>
       <p:sp>
         <p:nvSpPr>
-          <p:cNvPr id="114" name="Google Shape;114;p20"/>
+          <p:cNvPr id="116" name="Google Shape;116;p20"/>
           <p:cNvSpPr txBox="1"/>
           <p:nvPr/>
         </p:nvSpPr>
@@ -42080,7 +43153,7 @@
       </p:sp>
       <p:sp>
         <p:nvSpPr>
-          <p:cNvPr id="115" name="Google Shape;115;p20"/>
+          <p:cNvPr id="117" name="Google Shape;117;p20"/>
           <p:cNvSpPr txBox="1"/>
           <p:nvPr/>
         </p:nvSpPr>
@@ -42299,7 +43372,7 @@
       </p:sp>
       <p:graphicFrame>
         <p:nvGraphicFramePr>
-          <p:cNvPr id="116" name="Google Shape;116;p20"/>
+          <p:cNvPr id="118" name="Google Shape;118;p20"/>
           <p:cNvGraphicFramePr/>
           <p:nvPr/>
         </p:nvGraphicFramePr>
@@ -42312,7 +43385,7 @@
             <a:tbl>
               <a:tblPr>
                 <a:noFill/>
-                <a:tableStyleId>{D88F8B79-C435-432A-A991-AA3FCFF451A0}</a:tableStyleId>
+                <a:tableStyleId>{800332CD-9365-45DA-97F6-54CA6B42B096}</a:tableStyleId>
               </a:tblPr>
               <a:tblGrid>
                 <a:gridCol w="1113450">
@@ -46393,7 +47466,7 @@
       </p:graphicFrame>
       <p:sp>
         <p:nvSpPr>
-          <p:cNvPr id="117" name="Google Shape;117;p20"/>
+          <p:cNvPr id="119" name="Google Shape;119;p20"/>
           <p:cNvSpPr txBox="1"/>
           <p:nvPr/>
         </p:nvSpPr>
@@ -46506,7 +47579,7 @@
   <p:cSld>
     <p:spTree>
       <p:nvGrpSpPr>
-        <p:cNvPr id="1" name="Shape 121"/>
+        <p:cNvPr id="1" name="Shape 123"/>
         <p:cNvGrpSpPr/>
         <p:nvPr/>
       </p:nvGrpSpPr>
@@ -46520,7 +47593,7 @@
       </p:grpSpPr>
       <p:sp>
         <p:nvSpPr>
-          <p:cNvPr id="122" name="Google Shape;122;p21"/>
+          <p:cNvPr id="124" name="Google Shape;124;p21"/>
           <p:cNvSpPr txBox="1"/>
           <p:nvPr/>
         </p:nvSpPr>
@@ -46586,7 +47659,7 @@
       </p:sp>
       <p:sp>
         <p:nvSpPr>
-          <p:cNvPr id="123" name="Google Shape;123;p21"/>
+          <p:cNvPr id="125" name="Google Shape;125;p21"/>
           <p:cNvSpPr txBox="1"/>
           <p:nvPr/>
         </p:nvSpPr>
@@ -47207,7 +48280,7 @@
       </p:sp>
       <p:pic>
         <p:nvPicPr>
-          <p:cNvPr id="124" name="Google Shape;124;p21"/>
+          <p:cNvPr id="126" name="Google Shape;126;p21"/>
           <p:cNvPicPr preferRelativeResize="0"/>
           <p:nvPr/>
         </p:nvPicPr>
@@ -47246,7 +48319,7 @@
       </p:pic>
       <p:sp>
         <p:nvSpPr>
-          <p:cNvPr id="125" name="Google Shape;125;p21"/>
+          <p:cNvPr id="127" name="Google Shape;127;p21"/>
           <p:cNvSpPr txBox="1"/>
           <p:nvPr/>
         </p:nvSpPr>
@@ -47309,7 +48382,7 @@
       </p:sp>
       <p:sp>
         <p:nvSpPr>
-          <p:cNvPr id="126" name="Google Shape;126;p21"/>
+          <p:cNvPr id="128" name="Google Shape;128;p21"/>
           <p:cNvSpPr txBox="1"/>
           <p:nvPr/>
         </p:nvSpPr>
@@ -47383,7 +48456,7 @@
   <p:cSld>
     <p:spTree>
       <p:nvGrpSpPr>
-        <p:cNvPr id="1" name="Shape 130"/>
+        <p:cNvPr id="1" name="Shape 132"/>
         <p:cNvGrpSpPr/>
         <p:nvPr/>
       </p:nvGrpSpPr>
@@ -47397,7 +48470,7 @@
       </p:grpSpPr>
       <p:sp>
         <p:nvSpPr>
-          <p:cNvPr id="131" name="Google Shape;131;p22"/>
+          <p:cNvPr id="133" name="Google Shape;133;p22"/>
           <p:cNvSpPr txBox="1"/>
           <p:nvPr/>
         </p:nvSpPr>
@@ -47734,7 +48807,7 @@
       </p:sp>
       <p:pic>
         <p:nvPicPr>
-          <p:cNvPr id="132" name="Google Shape;132;p22"/>
+          <p:cNvPr id="134" name="Google Shape;134;p22"/>
           <p:cNvPicPr preferRelativeResize="0"/>
           <p:nvPr/>
         </p:nvPicPr>
@@ -47784,7 +48857,7 @@
   <p:cSld>
     <p:spTree>
       <p:nvGrpSpPr>
-        <p:cNvPr id="1" name="Shape 136"/>
+        <p:cNvPr id="1" name="Shape 138"/>
         <p:cNvGrpSpPr/>
         <p:nvPr/>
       </p:nvGrpSpPr>
@@ -47798,7 +48871,7 @@
       </p:grpSpPr>
       <p:sp>
         <p:nvSpPr>
-          <p:cNvPr id="137" name="Google Shape;137;p23"/>
+          <p:cNvPr id="139" name="Google Shape;139;p23"/>
           <p:cNvSpPr txBox="1"/>
           <p:nvPr/>
         </p:nvSpPr>
@@ -47864,7 +48937,7 @@
       </p:sp>
       <p:sp>
         <p:nvSpPr>
-          <p:cNvPr id="138" name="Google Shape;138;p23"/>
+          <p:cNvPr id="140" name="Google Shape;140;p23"/>
           <p:cNvSpPr txBox="1"/>
           <p:nvPr/>
         </p:nvSpPr>
@@ -48261,7 +49334,7 @@
       </p:sp>
       <p:sp>
         <p:nvSpPr>
-          <p:cNvPr id="139" name="Google Shape;139;p23"/>
+          <p:cNvPr id="141" name="Google Shape;141;p23"/>
           <p:cNvSpPr txBox="1"/>
           <p:nvPr/>
         </p:nvSpPr>
@@ -48599,7 +49672,7 @@
       </p:sp>
       <p:pic>
         <p:nvPicPr>
-          <p:cNvPr id="140" name="Google Shape;140;p23"/>
+          <p:cNvPr id="142" name="Google Shape;142;p23"/>
           <p:cNvPicPr preferRelativeResize="0"/>
           <p:nvPr/>
         </p:nvPicPr>
@@ -48638,7 +49711,7 @@
       </p:pic>
       <p:pic>
         <p:nvPicPr>
-          <p:cNvPr id="141" name="Google Shape;141;p23"/>
+          <p:cNvPr id="143" name="Google Shape;143;p23"/>
           <p:cNvPicPr preferRelativeResize="0"/>
           <p:nvPr/>
         </p:nvPicPr>
@@ -48677,7 +49750,7 @@
       </p:pic>
       <p:pic>
         <p:nvPicPr>
-          <p:cNvPr id="142" name="Google Shape;142;p23"/>
+          <p:cNvPr id="144" name="Google Shape;144;p23"/>
           <p:cNvPicPr preferRelativeResize="0"/>
           <p:nvPr/>
         </p:nvPicPr>
